--- a/slides/4-13_diabetes_drugs/4-13_diabetes_drugs.pptx
+++ b/slides/4-13_diabetes_drugs/4-13_diabetes_drugs.pptx
@@ -7204,9 +7204,9 @@
               <a:buChar char="•"/>
             </a:pPr>
             <a:r>
-              <a:rPr lang="ja-JP" altLang="en-US" sz="2400" b="1" dirty="0">
-                <a:solidFill>
-                  <a:srgbClr val="0072B2"/>
+              <a:rPr lang="ja-JP" altLang="en-US" sz="2400" dirty="0">
+                <a:solidFill>
+                  <a:srgbClr val="262626"/>
                 </a:solidFill>
                 <a:latin typeface="メイリオ" pitchFamily="34" charset="0"/>
                 <a:ea typeface="メイリオ" pitchFamily="34" charset="-122"/>

--- a/slides/4-13_diabetes_drugs/4-13_diabetes_drugs.pptx
+++ b/slides/4-13_diabetes_drugs/4-13_diabetes_drugs.pptx
@@ -3273,12 +3273,12 @@
         </p:nvSpPr>
         <p:spPr>
           <a:xfrm>
-            <a:off x="502920" y="1691640"/>
-            <a:ext cx="5480914" cy="3215945"/>
+            <a:off x="502920" y="1664208"/>
+            <a:ext cx="5480914" cy="3243377"/>
           </a:xfrm>
           <a:prstGeom prst="roundRect">
             <a:avLst>
-              <a:gd name="adj" fmla="val 2275"/>
+              <a:gd name="adj" fmla="val 2255"/>
             </a:avLst>
           </a:prstGeom>
           <a:solidFill>
@@ -3295,7 +3295,7 @@
         </p:nvSpPr>
         <p:spPr>
           <a:xfrm>
-            <a:off x="594360" y="1755648"/>
+            <a:off x="594360" y="1719072"/>
             <a:ext cx="5298034" cy="420624"/>
           </a:xfrm>
           <a:prstGeom prst="rect">
@@ -3334,7 +3334,7 @@
         </p:nvSpPr>
         <p:spPr>
           <a:xfrm>
-            <a:off x="594360" y="2157984"/>
+            <a:off x="594360" y="2121408"/>
             <a:ext cx="320040" cy="374904"/>
           </a:xfrm>
           <a:prstGeom prst="rect">
@@ -3373,7 +3373,7 @@
         </p:nvSpPr>
         <p:spPr>
           <a:xfrm>
-            <a:off x="850392" y="2157984"/>
+            <a:off x="850392" y="2121408"/>
             <a:ext cx="5042002" cy="374904"/>
           </a:xfrm>
           <a:prstGeom prst="rect">
@@ -3412,7 +3412,7 @@
         </p:nvSpPr>
         <p:spPr>
           <a:xfrm>
-            <a:off x="850392" y="2493569"/>
+            <a:off x="850392" y="2456993"/>
             <a:ext cx="5042002" cy="374904"/>
           </a:xfrm>
           <a:prstGeom prst="rect">
@@ -3451,7 +3451,7 @@
         </p:nvSpPr>
         <p:spPr>
           <a:xfrm>
-            <a:off x="594360" y="2828239"/>
+            <a:off x="594360" y="2791663"/>
             <a:ext cx="320040" cy="374904"/>
           </a:xfrm>
           <a:prstGeom prst="rect">
@@ -3490,7 +3490,7 @@
         </p:nvSpPr>
         <p:spPr>
           <a:xfrm>
-            <a:off x="850392" y="2828239"/>
+            <a:off x="850392" y="2791663"/>
             <a:ext cx="5042002" cy="374904"/>
           </a:xfrm>
           <a:prstGeom prst="rect">
@@ -3529,7 +3529,7 @@
         </p:nvSpPr>
         <p:spPr>
           <a:xfrm>
-            <a:off x="850392" y="3163824"/>
+            <a:off x="850392" y="3127248"/>
             <a:ext cx="5042002" cy="374904"/>
           </a:xfrm>
           <a:prstGeom prst="rect">
@@ -3568,7 +3568,7 @@
         </p:nvSpPr>
         <p:spPr>
           <a:xfrm>
-            <a:off x="594360" y="3499409"/>
+            <a:off x="594360" y="3462833"/>
             <a:ext cx="320040" cy="374904"/>
           </a:xfrm>
           <a:prstGeom prst="rect">
@@ -3607,7 +3607,7 @@
         </p:nvSpPr>
         <p:spPr>
           <a:xfrm>
-            <a:off x="850392" y="3499409"/>
+            <a:off x="850392" y="3462833"/>
             <a:ext cx="5042002" cy="374904"/>
           </a:xfrm>
           <a:prstGeom prst="rect">
@@ -3646,7 +3646,7 @@
         </p:nvSpPr>
         <p:spPr>
           <a:xfrm>
-            <a:off x="594360" y="3834079"/>
+            <a:off x="594360" y="3797503"/>
             <a:ext cx="320040" cy="374904"/>
           </a:xfrm>
           <a:prstGeom prst="rect">
@@ -3685,7 +3685,7 @@
         </p:nvSpPr>
         <p:spPr>
           <a:xfrm>
-            <a:off x="850392" y="3834079"/>
+            <a:off x="850392" y="3797503"/>
             <a:ext cx="5042002" cy="374904"/>
           </a:xfrm>
           <a:prstGeom prst="rect">
@@ -3724,7 +3724,7 @@
         </p:nvSpPr>
         <p:spPr>
           <a:xfrm>
-            <a:off x="850392" y="4169664"/>
+            <a:off x="850392" y="4133088"/>
             <a:ext cx="5042002" cy="374904"/>
           </a:xfrm>
           <a:prstGeom prst="rect">
@@ -3763,7 +3763,7 @@
         </p:nvSpPr>
         <p:spPr>
           <a:xfrm>
-            <a:off x="594360" y="4505249"/>
+            <a:off x="594360" y="4468673"/>
             <a:ext cx="320040" cy="374904"/>
           </a:xfrm>
           <a:prstGeom prst="rect">
@@ -3802,7 +3802,7 @@
         </p:nvSpPr>
         <p:spPr>
           <a:xfrm>
-            <a:off x="850392" y="4505249"/>
+            <a:off x="850392" y="4468673"/>
             <a:ext cx="5042002" cy="374904"/>
           </a:xfrm>
           <a:prstGeom prst="rect">
@@ -3841,12 +3841,12 @@
         </p:nvSpPr>
         <p:spPr>
           <a:xfrm>
-            <a:off x="6203290" y="1691640"/>
-            <a:ext cx="5480914" cy="3215945"/>
+            <a:off x="6203290" y="1664208"/>
+            <a:ext cx="5480914" cy="3243377"/>
           </a:xfrm>
           <a:prstGeom prst="roundRect">
             <a:avLst>
-              <a:gd name="adj" fmla="val 2275"/>
+              <a:gd name="adj" fmla="val 2255"/>
             </a:avLst>
           </a:prstGeom>
           <a:solidFill>
@@ -3863,7 +3863,7 @@
         </p:nvSpPr>
         <p:spPr>
           <a:xfrm>
-            <a:off x="6294730" y="1755648"/>
+            <a:off x="6294730" y="1719072"/>
             <a:ext cx="5298034" cy="420624"/>
           </a:xfrm>
           <a:prstGeom prst="rect">
@@ -3902,7 +3902,7 @@
         </p:nvSpPr>
         <p:spPr>
           <a:xfrm>
-            <a:off x="6294730" y="2157984"/>
+            <a:off x="6294730" y="2121408"/>
             <a:ext cx="320040" cy="374904"/>
           </a:xfrm>
           <a:prstGeom prst="rect">
@@ -3941,7 +3941,7 @@
         </p:nvSpPr>
         <p:spPr>
           <a:xfrm>
-            <a:off x="6550762" y="2157984"/>
+            <a:off x="6550762" y="2121408"/>
             <a:ext cx="5042002" cy="374904"/>
           </a:xfrm>
           <a:prstGeom prst="rect">
@@ -3980,7 +3980,7 @@
         </p:nvSpPr>
         <p:spPr>
           <a:xfrm>
-            <a:off x="6550762" y="2493569"/>
+            <a:off x="6550762" y="2456993"/>
             <a:ext cx="5042002" cy="374904"/>
           </a:xfrm>
           <a:prstGeom prst="rect">
@@ -4019,7 +4019,7 @@
         </p:nvSpPr>
         <p:spPr>
           <a:xfrm>
-            <a:off x="6294730" y="2828239"/>
+            <a:off x="6294730" y="2791663"/>
             <a:ext cx="320040" cy="374904"/>
           </a:xfrm>
           <a:prstGeom prst="rect">
@@ -4058,7 +4058,7 @@
         </p:nvSpPr>
         <p:spPr>
           <a:xfrm>
-            <a:off x="6550762" y="2828239"/>
+            <a:off x="6550762" y="2791663"/>
             <a:ext cx="5042002" cy="374904"/>
           </a:xfrm>
           <a:prstGeom prst="rect">
@@ -4097,7 +4097,7 @@
         </p:nvSpPr>
         <p:spPr>
           <a:xfrm>
-            <a:off x="6294730" y="3163824"/>
+            <a:off x="6294730" y="3127248"/>
             <a:ext cx="320040" cy="374904"/>
           </a:xfrm>
           <a:prstGeom prst="rect">
@@ -4136,7 +4136,7 @@
         </p:nvSpPr>
         <p:spPr>
           <a:xfrm>
-            <a:off x="6550762" y="3163824"/>
+            <a:off x="6550762" y="3127248"/>
             <a:ext cx="5042002" cy="374904"/>
           </a:xfrm>
           <a:prstGeom prst="rect">
@@ -4175,7 +4175,7 @@
         </p:nvSpPr>
         <p:spPr>
           <a:xfrm>
-            <a:off x="6550762" y="3499409"/>
+            <a:off x="6550762" y="3462833"/>
             <a:ext cx="5042002" cy="374904"/>
           </a:xfrm>
           <a:prstGeom prst="rect">
@@ -4214,7 +4214,7 @@
         </p:nvSpPr>
         <p:spPr>
           <a:xfrm>
-            <a:off x="6294730" y="3834079"/>
+            <a:off x="6294730" y="3797503"/>
             <a:ext cx="320040" cy="374904"/>
           </a:xfrm>
           <a:prstGeom prst="rect">
@@ -4253,7 +4253,7 @@
         </p:nvSpPr>
         <p:spPr>
           <a:xfrm>
-            <a:off x="6550762" y="3834079"/>
+            <a:off x="6550762" y="3797503"/>
             <a:ext cx="5042002" cy="374904"/>
           </a:xfrm>
           <a:prstGeom prst="rect">
@@ -4292,7 +4292,7 @@
         </p:nvSpPr>
         <p:spPr>
           <a:xfrm>
-            <a:off x="6294730" y="4169664"/>
+            <a:off x="6294730" y="4133088"/>
             <a:ext cx="320040" cy="374904"/>
           </a:xfrm>
           <a:prstGeom prst="rect">
@@ -4331,7 +4331,7 @@
         </p:nvSpPr>
         <p:spPr>
           <a:xfrm>
-            <a:off x="6550762" y="4169664"/>
+            <a:off x="6550762" y="4133088"/>
             <a:ext cx="5042002" cy="374904"/>
           </a:xfrm>
           <a:prstGeom prst="rect">
@@ -4370,7 +4370,7 @@
         </p:nvSpPr>
         <p:spPr>
           <a:xfrm>
-            <a:off x="6550762" y="4505249"/>
+            <a:off x="6550762" y="4468673"/>
             <a:ext cx="5042002" cy="374904"/>
           </a:xfrm>
           <a:prstGeom prst="rect">
@@ -4864,9 +4864,9 @@
             <a:tbl>
               <a:tblPr/>
               <a:tblGrid>
-                <a:gridCol w="2478024"/>
-                <a:gridCol w="2350008"/>
-                <a:gridCol w="6327648"/>
+                <a:gridCol w="2532888"/>
+                <a:gridCol w="2660904"/>
+                <a:gridCol w="5961888"/>
               </a:tblGrid>
               <a:tr h="411480">
                 <a:tc>
@@ -6024,7 +6024,7 @@
                           <a:ea typeface="メイリオ" pitchFamily="34" charset="-122"/>
                           <a:cs typeface="メイリオ" pitchFamily="34" charset="-120"/>
                         </a:rPr>
-                        <a:t>GLP-1</a:t>
+                        <a:t>GLP-1 受容体</a:t>
                       </a:r>
                       <a:endParaRPr lang="en-US" sz="2200" dirty="0">
                         <a:latin typeface="メイリオ" charset="0"/>
@@ -6048,7 +6048,7 @@
                           <a:ea typeface="メイリオ" pitchFamily="34" charset="-122"/>
                           <a:cs typeface="メイリオ" pitchFamily="34" charset="-120"/>
                         </a:rPr>
-                        <a:t>受容体作動薬</a:t>
+                        <a:t>作動薬</a:t>
                       </a:r>
                       <a:endParaRPr lang="en-US" sz="2200" dirty="0">
                         <a:latin typeface="メイリオ" charset="0"/>
@@ -6394,31 +6394,7 @@
                           <a:ea typeface="メイリオ" pitchFamily="34" charset="-122"/>
                           <a:cs typeface="メイリオ" pitchFamily="34" charset="-120"/>
                         </a:rPr>
-                        <a:t>当日朝は</a:t>
-                      </a:r>
-                      <a:endParaRPr lang="en-US" sz="2200" dirty="0">
-                        <a:latin typeface="メイリオ" charset="0"/>
-                        <a:ea typeface="メイリオ" charset="0"/>
-                        <a:cs typeface="メイリオ" charset="0"/>
-                      </a:endParaRPr>
-                    </a:p>
-                    <a:p>
-                      <a:pPr algn="l" indent="0" marL="0">
-                        <a:lnSpc>
-                          <a:spcPts val="2640"/>
-                        </a:lnSpc>
-                        <a:buNone/>
-                      </a:pPr>
-                      <a:r>
-                        <a:rPr lang="ja-JP" altLang="en-US" sz="2200" dirty="0">
-                          <a:solidFill>
-                            <a:srgbClr val="262626"/>
-                          </a:solidFill>
-                          <a:latin typeface="メイリオ" pitchFamily="34" charset="0"/>
-                          <a:ea typeface="メイリオ" pitchFamily="34" charset="-122"/>
-                          <a:cs typeface="メイリオ" pitchFamily="34" charset="-120"/>
-                        </a:rPr>
-                        <a:t>飲まない</a:t>
+                        <a:t>当日朝は飲まない</a:t>
                       </a:r>
                       <a:endParaRPr lang="en-US" sz="2200" dirty="0">
                         <a:latin typeface="メイリオ" charset="0"/>
@@ -7217,7 +7193,7 @@
             <a:r>
               <a:rPr lang="ja-JP" altLang="en-US" sz="2400" b="1" dirty="0">
                 <a:solidFill>
-                  <a:srgbClr val="D55E00"/>
+                  <a:srgbClr val="262626"/>
                 </a:solidFill>
                 <a:latin typeface="メイリオ" pitchFamily="34" charset="0"/>
                 <a:ea typeface="メイリオ" pitchFamily="34" charset="-122"/>
@@ -7868,12 +7844,12 @@
         </p:nvSpPr>
         <p:spPr>
           <a:xfrm>
-            <a:off x="502920" y="1691640"/>
-            <a:ext cx="5659222" cy="3215945"/>
+            <a:off x="502920" y="1664208"/>
+            <a:ext cx="5659222" cy="3243377"/>
           </a:xfrm>
           <a:prstGeom prst="roundRect">
             <a:avLst>
-              <a:gd name="adj" fmla="val 2275"/>
+              <a:gd name="adj" fmla="val 2255"/>
             </a:avLst>
           </a:prstGeom>
           <a:solidFill>
@@ -7890,7 +7866,7 @@
         </p:nvSpPr>
         <p:spPr>
           <a:xfrm>
-            <a:off x="594360" y="1755648"/>
+            <a:off x="594360" y="1719072"/>
             <a:ext cx="5476342" cy="420624"/>
           </a:xfrm>
           <a:prstGeom prst="rect">
@@ -7929,7 +7905,7 @@
         </p:nvSpPr>
         <p:spPr>
           <a:xfrm>
-            <a:off x="594360" y="2157984"/>
+            <a:off x="594360" y="2121408"/>
             <a:ext cx="320040" cy="374904"/>
           </a:xfrm>
           <a:prstGeom prst="rect">
@@ -7968,7 +7944,7 @@
         </p:nvSpPr>
         <p:spPr>
           <a:xfrm>
-            <a:off x="850392" y="2157984"/>
+            <a:off x="850392" y="2121408"/>
             <a:ext cx="5220310" cy="374904"/>
           </a:xfrm>
           <a:prstGeom prst="rect">
@@ -8007,7 +7983,7 @@
         </p:nvSpPr>
         <p:spPr>
           <a:xfrm>
-            <a:off x="850392" y="2493569"/>
+            <a:off x="850392" y="2456993"/>
             <a:ext cx="5220310" cy="374904"/>
           </a:xfrm>
           <a:prstGeom prst="rect">
@@ -8046,7 +8022,7 @@
         </p:nvSpPr>
         <p:spPr>
           <a:xfrm>
-            <a:off x="594360" y="2829154"/>
+            <a:off x="594360" y="2792578"/>
             <a:ext cx="320040" cy="374904"/>
           </a:xfrm>
           <a:prstGeom prst="rect">
@@ -8085,7 +8061,7 @@
         </p:nvSpPr>
         <p:spPr>
           <a:xfrm>
-            <a:off x="850392" y="2829154"/>
+            <a:off x="850392" y="2792578"/>
             <a:ext cx="5220310" cy="374904"/>
           </a:xfrm>
           <a:prstGeom prst="rect">
@@ -8124,7 +8100,7 @@
         </p:nvSpPr>
         <p:spPr>
           <a:xfrm>
-            <a:off x="850392" y="3164738"/>
+            <a:off x="850392" y="3128162"/>
             <a:ext cx="5220310" cy="374904"/>
           </a:xfrm>
           <a:prstGeom prst="rect">
@@ -8163,7 +8139,7 @@
         </p:nvSpPr>
         <p:spPr>
           <a:xfrm>
-            <a:off x="594360" y="3501238"/>
+            <a:off x="594360" y="3464662"/>
             <a:ext cx="320040" cy="374904"/>
           </a:xfrm>
           <a:prstGeom prst="rect">
@@ -8202,7 +8178,7 @@
         </p:nvSpPr>
         <p:spPr>
           <a:xfrm>
-            <a:off x="850392" y="3501238"/>
+            <a:off x="850392" y="3464662"/>
             <a:ext cx="5220310" cy="374904"/>
           </a:xfrm>
           <a:prstGeom prst="rect">
@@ -8241,7 +8217,7 @@
         </p:nvSpPr>
         <p:spPr>
           <a:xfrm>
-            <a:off x="850392" y="3835908"/>
+            <a:off x="850392" y="3799332"/>
             <a:ext cx="5220310" cy="374904"/>
           </a:xfrm>
           <a:prstGeom prst="rect">
@@ -8280,7 +8256,7 @@
         </p:nvSpPr>
         <p:spPr>
           <a:xfrm>
-            <a:off x="594360" y="4172407"/>
+            <a:off x="594360" y="4135831"/>
             <a:ext cx="320040" cy="374904"/>
           </a:xfrm>
           <a:prstGeom prst="rect">
@@ -8319,7 +8295,7 @@
         </p:nvSpPr>
         <p:spPr>
           <a:xfrm>
-            <a:off x="850392" y="4172407"/>
+            <a:off x="850392" y="4135831"/>
             <a:ext cx="5220310" cy="374904"/>
           </a:xfrm>
           <a:prstGeom prst="rect">
@@ -8358,7 +8334,7 @@
         </p:nvSpPr>
         <p:spPr>
           <a:xfrm>
-            <a:off x="850392" y="4507992"/>
+            <a:off x="850392" y="4471416"/>
             <a:ext cx="5220310" cy="374904"/>
           </a:xfrm>
           <a:prstGeom prst="rect">
@@ -8397,12 +8373,12 @@
         </p:nvSpPr>
         <p:spPr>
           <a:xfrm>
-            <a:off x="6381598" y="1691640"/>
-            <a:ext cx="5302606" cy="3215945"/>
+            <a:off x="6381598" y="1664208"/>
+            <a:ext cx="5302606" cy="3243377"/>
           </a:xfrm>
           <a:prstGeom prst="roundRect">
             <a:avLst>
-              <a:gd name="adj" fmla="val 2275"/>
+              <a:gd name="adj" fmla="val 2255"/>
             </a:avLst>
           </a:prstGeom>
           <a:solidFill>
@@ -8419,7 +8395,7 @@
         </p:nvSpPr>
         <p:spPr>
           <a:xfrm>
-            <a:off x="6473038" y="1755648"/>
+            <a:off x="6473038" y="1719072"/>
             <a:ext cx="5119726" cy="420624"/>
           </a:xfrm>
           <a:prstGeom prst="rect">
@@ -8458,7 +8434,7 @@
         </p:nvSpPr>
         <p:spPr>
           <a:xfrm>
-            <a:off x="6473038" y="2157984"/>
+            <a:off x="6473038" y="2121408"/>
             <a:ext cx="320040" cy="374904"/>
           </a:xfrm>
           <a:prstGeom prst="rect">
@@ -8497,7 +8473,7 @@
         </p:nvSpPr>
         <p:spPr>
           <a:xfrm>
-            <a:off x="6729070" y="2157984"/>
+            <a:off x="6729070" y="2121408"/>
             <a:ext cx="4863694" cy="374904"/>
           </a:xfrm>
           <a:prstGeom prst="rect">
@@ -8536,7 +8512,7 @@
         </p:nvSpPr>
         <p:spPr>
           <a:xfrm>
-            <a:off x="6729070" y="2493569"/>
+            <a:off x="6729070" y="2456993"/>
             <a:ext cx="4863694" cy="374904"/>
           </a:xfrm>
           <a:prstGeom prst="rect">
@@ -8575,7 +8551,7 @@
         </p:nvSpPr>
         <p:spPr>
           <a:xfrm>
-            <a:off x="6473038" y="2829154"/>
+            <a:off x="6473038" y="2792578"/>
             <a:ext cx="320040" cy="374904"/>
           </a:xfrm>
           <a:prstGeom prst="rect">
@@ -8614,7 +8590,7 @@
         </p:nvSpPr>
         <p:spPr>
           <a:xfrm>
-            <a:off x="6729070" y="2829154"/>
+            <a:off x="6729070" y="2792578"/>
             <a:ext cx="4863694" cy="374904"/>
           </a:xfrm>
           <a:prstGeom prst="rect">
@@ -8653,7 +8629,7 @@
         </p:nvSpPr>
         <p:spPr>
           <a:xfrm>
-            <a:off x="6729070" y="3164738"/>
+            <a:off x="6729070" y="3128162"/>
             <a:ext cx="4863694" cy="374904"/>
           </a:xfrm>
           <a:prstGeom prst="rect">
@@ -8692,7 +8668,7 @@
         </p:nvSpPr>
         <p:spPr>
           <a:xfrm>
-            <a:off x="6473038" y="3501238"/>
+            <a:off x="6473038" y="3464662"/>
             <a:ext cx="320040" cy="374904"/>
           </a:xfrm>
           <a:prstGeom prst="rect">
@@ -8731,7 +8707,7 @@
         </p:nvSpPr>
         <p:spPr>
           <a:xfrm>
-            <a:off x="6729070" y="3501238"/>
+            <a:off x="6729070" y="3464662"/>
             <a:ext cx="4863694" cy="374904"/>
           </a:xfrm>
           <a:prstGeom prst="rect">
@@ -8770,7 +8746,7 @@
         </p:nvSpPr>
         <p:spPr>
           <a:xfrm>
-            <a:off x="6729070" y="3835908"/>
+            <a:off x="6729070" y="3799332"/>
             <a:ext cx="4863694" cy="374904"/>
           </a:xfrm>
           <a:prstGeom prst="rect">
@@ -8809,7 +8785,7 @@
         </p:nvSpPr>
         <p:spPr>
           <a:xfrm>
-            <a:off x="6473038" y="4172407"/>
+            <a:off x="6473038" y="4135831"/>
             <a:ext cx="320040" cy="374904"/>
           </a:xfrm>
           <a:prstGeom prst="rect">
@@ -8848,7 +8824,7 @@
         </p:nvSpPr>
         <p:spPr>
           <a:xfrm>
-            <a:off x="6729070" y="4172407"/>
+            <a:off x="6729070" y="4135831"/>
             <a:ext cx="4863694" cy="374904"/>
           </a:xfrm>
           <a:prstGeom prst="rect">
@@ -8887,7 +8863,7 @@
         </p:nvSpPr>
         <p:spPr>
           <a:xfrm>
-            <a:off x="6729070" y="4507992"/>
+            <a:off x="6729070" y="4471416"/>
             <a:ext cx="4863694" cy="374904"/>
           </a:xfrm>
           <a:prstGeom prst="rect">
@@ -9366,12 +9342,12 @@
         </p:nvSpPr>
         <p:spPr>
           <a:xfrm>
-            <a:off x="502920" y="1691640"/>
-            <a:ext cx="11183112" cy="3499409"/>
+            <a:off x="502920" y="1664208"/>
+            <a:ext cx="11183112" cy="3554273"/>
           </a:xfrm>
           <a:prstGeom prst="roundRect">
             <a:avLst>
-              <a:gd name="adj" fmla="val 2090"/>
+              <a:gd name="adj" fmla="val 2058"/>
             </a:avLst>
           </a:prstGeom>
           <a:solidFill>
@@ -9388,7 +9364,7 @@
         </p:nvSpPr>
         <p:spPr>
           <a:xfrm>
-            <a:off x="630936" y="1764792"/>
+            <a:off x="630936" y="1737360"/>
             <a:ext cx="10927080" cy="374904"/>
           </a:xfrm>
           <a:prstGeom prst="rect">
@@ -9438,7 +9414,7 @@
         </p:nvSpPr>
         <p:spPr>
           <a:xfrm>
-            <a:off x="941832" y="2100377"/>
+            <a:off x="941832" y="2072945"/>
             <a:ext cx="10616184" cy="374904"/>
           </a:xfrm>
           <a:prstGeom prst="rect">
@@ -9477,7 +9453,7 @@
         </p:nvSpPr>
         <p:spPr>
           <a:xfrm>
-            <a:off x="630936" y="2435047"/>
+            <a:off x="630936" y="2407615"/>
             <a:ext cx="10927080" cy="374904"/>
           </a:xfrm>
           <a:prstGeom prst="rect">
@@ -9527,7 +9503,7 @@
         </p:nvSpPr>
         <p:spPr>
           <a:xfrm>
-            <a:off x="941832" y="2770632"/>
+            <a:off x="941832" y="2743200"/>
             <a:ext cx="10616184" cy="374904"/>
           </a:xfrm>
           <a:prstGeom prst="rect">
@@ -9566,7 +9542,7 @@
         </p:nvSpPr>
         <p:spPr>
           <a:xfrm>
-            <a:off x="630936" y="3106217"/>
+            <a:off x="630936" y="3078785"/>
             <a:ext cx="10927080" cy="374904"/>
           </a:xfrm>
           <a:prstGeom prst="rect">
@@ -9616,7 +9592,7 @@
         </p:nvSpPr>
         <p:spPr>
           <a:xfrm>
-            <a:off x="630936" y="3440887"/>
+            <a:off x="630936" y="3413455"/>
             <a:ext cx="10927080" cy="374904"/>
           </a:xfrm>
           <a:prstGeom prst="rect">
@@ -9666,7 +9642,7 @@
         </p:nvSpPr>
         <p:spPr>
           <a:xfrm>
-            <a:off x="941832" y="3776472"/>
+            <a:off x="941832" y="3749040"/>
             <a:ext cx="10616184" cy="374904"/>
           </a:xfrm>
           <a:prstGeom prst="rect">
@@ -9727,7 +9703,7 @@
         </p:nvSpPr>
         <p:spPr>
           <a:xfrm>
-            <a:off x="630936" y="4112057"/>
+            <a:off x="630936" y="4084625"/>
             <a:ext cx="10927080" cy="374904"/>
           </a:xfrm>
           <a:prstGeom prst="rect">
@@ -9777,7 +9753,7 @@
         </p:nvSpPr>
         <p:spPr>
           <a:xfrm>
-            <a:off x="941832" y="4446727"/>
+            <a:off x="941832" y="4419295"/>
             <a:ext cx="10616184" cy="374904"/>
           </a:xfrm>
           <a:prstGeom prst="rect">
@@ -9816,7 +9792,7 @@
         </p:nvSpPr>
         <p:spPr>
           <a:xfrm>
-            <a:off x="630936" y="4782312"/>
+            <a:off x="630936" y="4754880"/>
             <a:ext cx="10927080" cy="374904"/>
           </a:xfrm>
           <a:prstGeom prst="rect">
@@ -9866,8 +9842,8 @@
         </p:nvSpPr>
         <p:spPr>
           <a:xfrm>
-            <a:off x="502920" y="5421478"/>
-            <a:ext cx="11183112" cy="457200"/>
+            <a:off x="502920" y="5453482"/>
+            <a:ext cx="11183112" cy="420624"/>
           </a:xfrm>
           <a:prstGeom prst="rect">
             <a:avLst/>
